--- a/docs/slides/pptx/worldmm_spatial_deck.pptx
+++ b/docs/slides/pptx/worldmm_spatial_deck.pptx
@@ -16,9 +16,6 @@
     <p:sldId id="264" r:id="rId15"/>
     <p:sldId id="265" r:id="rId16"/>
     <p:sldId id="266" r:id="rId17"/>
-    <p:sldId id="267" r:id="rId18"/>
-    <p:sldId id="268" r:id="rId19"/>
-    <p:sldId id="269" r:id="rId20"/>
   </p:sldIdLst>
   <p:sldSz cx="12191695" cy="6858000" type="screen4x3"/>
   <p:notesSz cx="6858000" cy="9144000"/>
@@ -3145,7 +3142,7 @@
       <p:grpSpPr/>
       <p:pic>
         <p:nvPicPr>
-          <p:cNvPr id="2" name="Picture 1" descr="slide_09_new-left-of-direction-v2.png"/>
+          <p:cNvPr id="2" name="Picture 1" descr="slide_09_spatial-hero-SH-B-005.png"/>
           <p:cNvPicPr>
             <a:picLocks noChangeAspect="1"/>
           </p:cNvPicPr>
@@ -3187,133 +3184,7 @@
       <p:grpSpPr/>
       <p:pic>
         <p:nvPicPr>
-          <p:cNvPr id="2" name="Picture 1" descr="slide_10_q6-grow-flowers-v2.png"/>
-          <p:cNvPicPr>
-            <a:picLocks noChangeAspect="1"/>
-          </p:cNvPicPr>
-          <p:nvPr/>
-        </p:nvPicPr>
-        <p:blipFill>
-          <a:blip r:embed="rId2"/>
-          <a:stretch>
-            <a:fillRect/>
-          </a:stretch>
-        </p:blipFill>
-        <p:spPr>
-          <a:xfrm>
-            <a:off x="0" y="0"/>
-            <a:ext cx="12191695" cy="6858000"/>
-          </a:xfrm>
-          <a:prstGeom prst="rect">
-            <a:avLst/>
-          </a:prstGeom>
-        </p:spPr>
-      </p:pic>
-    </p:spTree>
-  </p:cSld>
-  <p:clrMapOvr>
-    <a:masterClrMapping/>
-  </p:clrMapOvr>
-</p:sld>
-</file>
-
-<file path=ppt/slides/slide12.xml><?xml version="1.0" encoding="utf-8"?>
-<p:sld xmlns:a="http://schemas.openxmlformats.org/drawingml/2006/main" xmlns:p="http://schemas.openxmlformats.org/presentationml/2006/main" xmlns:r="http://schemas.openxmlformats.org/officeDocument/2006/relationships">
-  <p:cSld>
-    <p:spTree>
-      <p:nvGrpSpPr>
-        <p:cNvPr id="1" name=""/>
-        <p:cNvGrpSpPr/>
-        <p:nvPr/>
-      </p:nvGrpSpPr>
-      <p:grpSpPr/>
-      <p:pic>
-        <p:nvPicPr>
-          <p:cNvPr id="2" name="Picture 1" descr="slide_11_q45-coffee-timing-v2.png"/>
-          <p:cNvPicPr>
-            <a:picLocks noChangeAspect="1"/>
-          </p:cNvPicPr>
-          <p:nvPr/>
-        </p:nvPicPr>
-        <p:blipFill>
-          <a:blip r:embed="rId2"/>
-          <a:stretch>
-            <a:fillRect/>
-          </a:stretch>
-        </p:blipFill>
-        <p:spPr>
-          <a:xfrm>
-            <a:off x="0" y="0"/>
-            <a:ext cx="12191695" cy="6858000"/>
-          </a:xfrm>
-          <a:prstGeom prst="rect">
-            <a:avLst/>
-          </a:prstGeom>
-        </p:spPr>
-      </p:pic>
-    </p:spTree>
-  </p:cSld>
-  <p:clrMapOvr>
-    <a:masterClrMapping/>
-  </p:clrMapOvr>
-</p:sld>
-</file>
-
-<file path=ppt/slides/slide13.xml><?xml version="1.0" encoding="utf-8"?>
-<p:sld xmlns:a="http://schemas.openxmlformats.org/drawingml/2006/main" xmlns:p="http://schemas.openxmlformats.org/presentationml/2006/main" xmlns:r="http://schemas.openxmlformats.org/officeDocument/2006/relationships">
-  <p:cSld>
-    <p:spTree>
-      <p:nvGrpSpPr>
-        <p:cNvPr id="1" name=""/>
-        <p:cNvGrpSpPr/>
-        <p:nvPr/>
-      </p:nvGrpSpPr>
-      <p:grpSpPr/>
-      <p:pic>
-        <p:nvPicPr>
-          <p:cNvPr id="2" name="Picture 1" descr="slide_12_q50-phone-habit-v2.png"/>
-          <p:cNvPicPr>
-            <a:picLocks noChangeAspect="1"/>
-          </p:cNvPicPr>
-          <p:nvPr/>
-        </p:nvPicPr>
-        <p:blipFill>
-          <a:blip r:embed="rId2"/>
-          <a:stretch>
-            <a:fillRect/>
-          </a:stretch>
-        </p:blipFill>
-        <p:spPr>
-          <a:xfrm>
-            <a:off x="0" y="0"/>
-            <a:ext cx="12191695" cy="6858000"/>
-          </a:xfrm>
-          <a:prstGeom prst="rect">
-            <a:avLst/>
-          </a:prstGeom>
-        </p:spPr>
-      </p:pic>
-    </p:spTree>
-  </p:cSld>
-  <p:clrMapOvr>
-    <a:masterClrMapping/>
-  </p:clrMapOvr>
-</p:sld>
-</file>
-
-<file path=ppt/slides/slide14.xml><?xml version="1.0" encoding="utf-8"?>
-<p:sld xmlns:a="http://schemas.openxmlformats.org/drawingml/2006/main" xmlns:p="http://schemas.openxmlformats.org/presentationml/2006/main" xmlns:r="http://schemas.openxmlformats.org/officeDocument/2006/relationships">
-  <p:cSld>
-    <p:spTree>
-      <p:nvGrpSpPr>
-        <p:cNvPr id="1" name=""/>
-        <p:cNvGrpSpPr/>
-        <p:nvPr/>
-      </p:nvGrpSpPr>
-      <p:grpSpPr/>
-      <p:pic>
-        <p:nvPicPr>
-          <p:cNvPr id="2" name="Picture 1" descr="slide_13_place-graph.png"/>
+          <p:cNvPr id="2" name="Picture 1" descr="slide_10_spatial-hero-SH-B-008.png"/>
           <p:cNvPicPr>
             <a:picLocks noChangeAspect="1"/>
           </p:cNvPicPr>
@@ -3355,7 +3226,7 @@
       <p:grpSpPr/>
       <p:pic>
         <p:nvPicPr>
-          <p:cNvPr id="2" name="Picture 1" descr="slide_01_q1-screwdriver-v2.png"/>
+          <p:cNvPr id="2" name="Picture 1" descr="slide_01_place-graph.png"/>
           <p:cNvPicPr>
             <a:picLocks noChangeAspect="1"/>
           </p:cNvPicPr>
@@ -3397,7 +3268,7 @@
       <p:grpSpPr/>
       <p:pic>
         <p:nvPicPr>
-          <p:cNvPr id="2" name="Picture 1" descr="slide_02_q33-takeout-app-v2.png"/>
+          <p:cNvPr id="2" name="Picture 1" descr="slide_02_spatial-hero-SH-A-001.png"/>
           <p:cNvPicPr>
             <a:picLocks noChangeAspect="1"/>
           </p:cNvPicPr>
@@ -3439,7 +3310,7 @@
       <p:grpSpPr/>
       <p:pic>
         <p:nvPicPr>
-          <p:cNvPr id="2" name="Picture 1" descr="slide_03_q53-hot-pot-v2.png"/>
+          <p:cNvPr id="2" name="Picture 1" descr="slide_03_spatial-hero-SH-B-002.png"/>
           <p:cNvPicPr>
             <a:picLocks noChangeAspect="1"/>
           </p:cNvPicPr>
@@ -3481,7 +3352,7 @@
       <p:grpSpPr/>
       <p:pic>
         <p:nvPicPr>
-          <p:cNvPr id="2" name="Picture 1" descr="slide_04_p6-meeting-room-floor-v2.png"/>
+          <p:cNvPr id="2" name="Picture 1" descr="slide_04_spatial-hero-SH-C-006.png"/>
           <p:cNvPicPr>
             <a:picLocks noChangeAspect="1"/>
           </p:cNvPicPr>
@@ -3523,7 +3394,7 @@
       <p:grpSpPr/>
       <p:pic>
         <p:nvPicPr>
-          <p:cNvPr id="2" name="Picture 1" descr="slide_05_n1-kitchen-proximity-v2.png"/>
+          <p:cNvPr id="2" name="Picture 1" descr="slide_05_spatial-hero-SH-E-004.png"/>
           <p:cNvPicPr>
             <a:picLocks noChangeAspect="1"/>
           </p:cNvPicPr>
@@ -3565,7 +3436,7 @@
       <p:grpSpPr/>
       <p:pic>
         <p:nvPicPr>
-          <p:cNvPr id="2" name="Picture 1" descr="slide_06_c1-kitchen-contains-v2.png"/>
+          <p:cNvPr id="2" name="Picture 1" descr="slide_06_spatial-hero-SH-F-005.png"/>
           <p:cNvPicPr>
             <a:picLocks noChangeAspect="1"/>
           </p:cNvPicPr>
@@ -3607,7 +3478,7 @@
       <p:grpSpPr/>
       <p:pic>
         <p:nvPicPr>
-          <p:cNvPr id="2" name="Picture 1" descr="slide_07_new-where-am-i-v2.png"/>
+          <p:cNvPr id="2" name="Picture 1" descr="slide_07_spatial-hero-SH-A-002.png"/>
           <p:cNvPicPr>
             <a:picLocks noChangeAspect="1"/>
           </p:cNvPicPr>
@@ -3649,7 +3520,7 @@
       <p:grpSpPr/>
       <p:pic>
         <p:nvPicPr>
-          <p:cNvPr id="2" name="Picture 1" descr="slide_08_new-group-locator-v2.png"/>
+          <p:cNvPr id="2" name="Picture 1" descr="slide_08_spatial-hero-SH-B-001.png"/>
           <p:cNvPicPr>
             <a:picLocks noChangeAspect="1"/>
           </p:cNvPicPr>

--- a/docs/slides/pptx/worldmm_spatial_deck.pptx
+++ b/docs/slides/pptx/worldmm_spatial_deck.pptx
@@ -16,6 +16,7 @@
     <p:sldId id="264" r:id="rId15"/>
     <p:sldId id="265" r:id="rId16"/>
     <p:sldId id="266" r:id="rId17"/>
+    <p:sldId id="267" r:id="rId18"/>
   </p:sldIdLst>
   <p:sldSz cx="12191695" cy="6858000" type="screen4x3"/>
   <p:notesSz cx="6858000" cy="9144000"/>
@@ -3142,7 +3143,7 @@
       <p:grpSpPr/>
       <p:pic>
         <p:nvPicPr>
-          <p:cNvPr id="2" name="Picture 1" descr="slide_09_spatial-hero-SH-B-005.png"/>
+          <p:cNvPr id="2" name="Picture 1" descr="slide_09_spatial-hero-SH-B-001.png"/>
           <p:cNvPicPr>
             <a:picLocks noChangeAspect="1"/>
           </p:cNvPicPr>
@@ -3184,7 +3185,49 @@
       <p:grpSpPr/>
       <p:pic>
         <p:nvPicPr>
-          <p:cNvPr id="2" name="Picture 1" descr="slide_10_spatial-hero-SH-B-008.png"/>
+          <p:cNvPr id="2" name="Picture 1" descr="slide_10_spatial-hero-SH-B-005.png"/>
+          <p:cNvPicPr>
+            <a:picLocks noChangeAspect="1"/>
+          </p:cNvPicPr>
+          <p:nvPr/>
+        </p:nvPicPr>
+        <p:blipFill>
+          <a:blip r:embed="rId2"/>
+          <a:stretch>
+            <a:fillRect/>
+          </a:stretch>
+        </p:blipFill>
+        <p:spPr>
+          <a:xfrm>
+            <a:off x="0" y="0"/>
+            <a:ext cx="12191695" cy="6858000"/>
+          </a:xfrm>
+          <a:prstGeom prst="rect">
+            <a:avLst/>
+          </a:prstGeom>
+        </p:spPr>
+      </p:pic>
+    </p:spTree>
+  </p:cSld>
+  <p:clrMapOvr>
+    <a:masterClrMapping/>
+  </p:clrMapOvr>
+</p:sld>
+</file>
+
+<file path=ppt/slides/slide12.xml><?xml version="1.0" encoding="utf-8"?>
+<p:sld xmlns:a="http://schemas.openxmlformats.org/drawingml/2006/main" xmlns:p="http://schemas.openxmlformats.org/presentationml/2006/main" xmlns:r="http://schemas.openxmlformats.org/officeDocument/2006/relationships">
+  <p:cSld>
+    <p:spTree>
+      <p:nvGrpSpPr>
+        <p:cNvPr id="1" name=""/>
+        <p:cNvGrpSpPr/>
+        <p:nvPr/>
+      </p:nvGrpSpPr>
+      <p:grpSpPr/>
+      <p:pic>
+        <p:nvPicPr>
+          <p:cNvPr id="2" name="Picture 1" descr="slide_11_spatial-hero-SH-B-008.png"/>
           <p:cNvPicPr>
             <a:picLocks noChangeAspect="1"/>
           </p:cNvPicPr>
@@ -3226,7 +3269,7 @@
       <p:grpSpPr/>
       <p:pic>
         <p:nvPicPr>
-          <p:cNvPr id="2" name="Picture 1" descr="slide_01_place-graph.png"/>
+          <p:cNvPr id="2" name="Picture 1" descr="slide_01_visual-axis-evolution.png"/>
           <p:cNvPicPr>
             <a:picLocks noChangeAspect="1"/>
           </p:cNvPicPr>
@@ -3268,7 +3311,7 @@
       <p:grpSpPr/>
       <p:pic>
         <p:nvPicPr>
-          <p:cNvPr id="2" name="Picture 1" descr="slide_02_spatial-hero-SH-A-001.png"/>
+          <p:cNvPr id="2" name="Picture 1" descr="slide_02_place-graph.png"/>
           <p:cNvPicPr>
             <a:picLocks noChangeAspect="1"/>
           </p:cNvPicPr>
@@ -3310,7 +3353,7 @@
       <p:grpSpPr/>
       <p:pic>
         <p:nvPicPr>
-          <p:cNvPr id="2" name="Picture 1" descr="slide_03_spatial-hero-SH-B-002.png"/>
+          <p:cNvPr id="2" name="Picture 1" descr="slide_03_spatial-hero-SH-A-001.png"/>
           <p:cNvPicPr>
             <a:picLocks noChangeAspect="1"/>
           </p:cNvPicPr>
@@ -3352,7 +3395,7 @@
       <p:grpSpPr/>
       <p:pic>
         <p:nvPicPr>
-          <p:cNvPr id="2" name="Picture 1" descr="slide_04_spatial-hero-SH-C-006.png"/>
+          <p:cNvPr id="2" name="Picture 1" descr="slide_04_spatial-hero-SH-B-002.png"/>
           <p:cNvPicPr>
             <a:picLocks noChangeAspect="1"/>
           </p:cNvPicPr>
@@ -3394,7 +3437,7 @@
       <p:grpSpPr/>
       <p:pic>
         <p:nvPicPr>
-          <p:cNvPr id="2" name="Picture 1" descr="slide_05_spatial-hero-SH-E-004.png"/>
+          <p:cNvPr id="2" name="Picture 1" descr="slide_05_spatial-hero-SH-C-006.png"/>
           <p:cNvPicPr>
             <a:picLocks noChangeAspect="1"/>
           </p:cNvPicPr>
@@ -3436,7 +3479,7 @@
       <p:grpSpPr/>
       <p:pic>
         <p:nvPicPr>
-          <p:cNvPr id="2" name="Picture 1" descr="slide_06_spatial-hero-SH-F-005.png"/>
+          <p:cNvPr id="2" name="Picture 1" descr="slide_06_spatial-hero-SH-E-004.png"/>
           <p:cNvPicPr>
             <a:picLocks noChangeAspect="1"/>
           </p:cNvPicPr>
@@ -3478,7 +3521,7 @@
       <p:grpSpPr/>
       <p:pic>
         <p:nvPicPr>
-          <p:cNvPr id="2" name="Picture 1" descr="slide_07_spatial-hero-SH-A-002.png"/>
+          <p:cNvPr id="2" name="Picture 1" descr="slide_07_spatial-hero-SH-F-005.png"/>
           <p:cNvPicPr>
             <a:picLocks noChangeAspect="1"/>
           </p:cNvPicPr>
@@ -3520,7 +3563,7 @@
       <p:grpSpPr/>
       <p:pic>
         <p:nvPicPr>
-          <p:cNvPr id="2" name="Picture 1" descr="slide_08_spatial-hero-SH-B-001.png"/>
+          <p:cNvPr id="2" name="Picture 1" descr="slide_08_spatial-hero-SH-A-002.png"/>
           <p:cNvPicPr>
             <a:picLocks noChangeAspect="1"/>
           </p:cNvPicPr>

--- a/docs/slides/pptx/worldmm_spatial_deck.pptx
+++ b/docs/slides/pptx/worldmm_spatial_deck.pptx
@@ -17,6 +17,8 @@
     <p:sldId id="265" r:id="rId16"/>
     <p:sldId id="266" r:id="rId17"/>
     <p:sldId id="267" r:id="rId18"/>
+    <p:sldId id="268" r:id="rId19"/>
+    <p:sldId id="269" r:id="rId20"/>
   </p:sldIdLst>
   <p:sldSz cx="12191695" cy="6858000" type="screen4x3"/>
   <p:notesSz cx="6858000" cy="9144000"/>
@@ -3143,7 +3145,7 @@
       <p:grpSpPr/>
       <p:pic>
         <p:nvPicPr>
-          <p:cNvPr id="2" name="Picture 1" descr="slide_09_spatial-hero-SH-B-001.png"/>
+          <p:cNvPr id="2" name="Picture 1" descr="slide_09_spatial-hero-SH-F-005.png"/>
           <p:cNvPicPr>
             <a:picLocks noChangeAspect="1"/>
           </p:cNvPicPr>
@@ -3185,7 +3187,7 @@
       <p:grpSpPr/>
       <p:pic>
         <p:nvPicPr>
-          <p:cNvPr id="2" name="Picture 1" descr="slide_10_spatial-hero-SH-B-005.png"/>
+          <p:cNvPr id="2" name="Picture 1" descr="slide_10_spatial-hero-SH-A-002.png"/>
           <p:cNvPicPr>
             <a:picLocks noChangeAspect="1"/>
           </p:cNvPicPr>
@@ -3227,7 +3229,91 @@
       <p:grpSpPr/>
       <p:pic>
         <p:nvPicPr>
-          <p:cNvPr id="2" name="Picture 1" descr="slide_11_spatial-hero-SH-B-008.png"/>
+          <p:cNvPr id="2" name="Picture 1" descr="slide_11_spatial-hero-SH-B-001.png"/>
+          <p:cNvPicPr>
+            <a:picLocks noChangeAspect="1"/>
+          </p:cNvPicPr>
+          <p:nvPr/>
+        </p:nvPicPr>
+        <p:blipFill>
+          <a:blip r:embed="rId2"/>
+          <a:stretch>
+            <a:fillRect/>
+          </a:stretch>
+        </p:blipFill>
+        <p:spPr>
+          <a:xfrm>
+            <a:off x="0" y="0"/>
+            <a:ext cx="12191695" cy="6858000"/>
+          </a:xfrm>
+          <a:prstGeom prst="rect">
+            <a:avLst/>
+          </a:prstGeom>
+        </p:spPr>
+      </p:pic>
+    </p:spTree>
+  </p:cSld>
+  <p:clrMapOvr>
+    <a:masterClrMapping/>
+  </p:clrMapOvr>
+</p:sld>
+</file>
+
+<file path=ppt/slides/slide13.xml><?xml version="1.0" encoding="utf-8"?>
+<p:sld xmlns:a="http://schemas.openxmlformats.org/drawingml/2006/main" xmlns:p="http://schemas.openxmlformats.org/presentationml/2006/main" xmlns:r="http://schemas.openxmlformats.org/officeDocument/2006/relationships">
+  <p:cSld>
+    <p:spTree>
+      <p:nvGrpSpPr>
+        <p:cNvPr id="1" name=""/>
+        <p:cNvGrpSpPr/>
+        <p:nvPr/>
+      </p:nvGrpSpPr>
+      <p:grpSpPr/>
+      <p:pic>
+        <p:nvPicPr>
+          <p:cNvPr id="2" name="Picture 1" descr="slide_12_spatial-hero-SH-B-005.png"/>
+          <p:cNvPicPr>
+            <a:picLocks noChangeAspect="1"/>
+          </p:cNvPicPr>
+          <p:nvPr/>
+        </p:nvPicPr>
+        <p:blipFill>
+          <a:blip r:embed="rId2"/>
+          <a:stretch>
+            <a:fillRect/>
+          </a:stretch>
+        </p:blipFill>
+        <p:spPr>
+          <a:xfrm>
+            <a:off x="0" y="0"/>
+            <a:ext cx="12191695" cy="6858000"/>
+          </a:xfrm>
+          <a:prstGeom prst="rect">
+            <a:avLst/>
+          </a:prstGeom>
+        </p:spPr>
+      </p:pic>
+    </p:spTree>
+  </p:cSld>
+  <p:clrMapOvr>
+    <a:masterClrMapping/>
+  </p:clrMapOvr>
+</p:sld>
+</file>
+
+<file path=ppt/slides/slide14.xml><?xml version="1.0" encoding="utf-8"?>
+<p:sld xmlns:a="http://schemas.openxmlformats.org/drawingml/2006/main" xmlns:p="http://schemas.openxmlformats.org/presentationml/2006/main" xmlns:r="http://schemas.openxmlformats.org/officeDocument/2006/relationships">
+  <p:cSld>
+    <p:spTree>
+      <p:nvGrpSpPr>
+        <p:cNvPr id="1" name=""/>
+        <p:cNvGrpSpPr/>
+        <p:nvPr/>
+      </p:nvGrpSpPr>
+      <p:grpSpPr/>
+      <p:pic>
+        <p:nvPicPr>
+          <p:cNvPr id="2" name="Picture 1" descr="slide_13_spatial-hero-SH-B-008.png"/>
           <p:cNvPicPr>
             <a:picLocks noChangeAspect="1"/>
           </p:cNvPicPr>
@@ -3311,7 +3397,7 @@
       <p:grpSpPr/>
       <p:pic>
         <p:nvPicPr>
-          <p:cNvPr id="2" name="Picture 1" descr="slide_02_place-graph.png"/>
+          <p:cNvPr id="2" name="Picture 1" descr="slide_02_spatial-retrieval-gs-mock.png"/>
           <p:cNvPicPr>
             <a:picLocks noChangeAspect="1"/>
           </p:cNvPicPr>
@@ -3353,7 +3439,7 @@
       <p:grpSpPr/>
       <p:pic>
         <p:nvPicPr>
-          <p:cNvPr id="2" name="Picture 1" descr="slide_03_spatial-hero-SH-A-001.png"/>
+          <p:cNvPr id="2" name="Picture 1" descr="slide_03_place-graph.png"/>
           <p:cNvPicPr>
             <a:picLocks noChangeAspect="1"/>
           </p:cNvPicPr>
@@ -3395,7 +3481,7 @@
       <p:grpSpPr/>
       <p:pic>
         <p:nvPicPr>
-          <p:cNvPr id="2" name="Picture 1" descr="slide_04_spatial-hero-SH-B-002.png"/>
+          <p:cNvPr id="2" name="Picture 1" descr="slide_04_aea-place-graph.png"/>
           <p:cNvPicPr>
             <a:picLocks noChangeAspect="1"/>
           </p:cNvPicPr>
@@ -3437,7 +3523,7 @@
       <p:grpSpPr/>
       <p:pic>
         <p:nvPicPr>
-          <p:cNvPr id="2" name="Picture 1" descr="slide_05_spatial-hero-SH-C-006.png"/>
+          <p:cNvPr id="2" name="Picture 1" descr="slide_05_spatial-hero-SH-A-001.png"/>
           <p:cNvPicPr>
             <a:picLocks noChangeAspect="1"/>
           </p:cNvPicPr>
@@ -3479,7 +3565,7 @@
       <p:grpSpPr/>
       <p:pic>
         <p:nvPicPr>
-          <p:cNvPr id="2" name="Picture 1" descr="slide_06_spatial-hero-SH-E-004.png"/>
+          <p:cNvPr id="2" name="Picture 1" descr="slide_06_spatial-hero-SH-B-002.png"/>
           <p:cNvPicPr>
             <a:picLocks noChangeAspect="1"/>
           </p:cNvPicPr>
@@ -3521,7 +3607,7 @@
       <p:grpSpPr/>
       <p:pic>
         <p:nvPicPr>
-          <p:cNvPr id="2" name="Picture 1" descr="slide_07_spatial-hero-SH-F-005.png"/>
+          <p:cNvPr id="2" name="Picture 1" descr="slide_07_spatial-hero-SH-C-006.png"/>
           <p:cNvPicPr>
             <a:picLocks noChangeAspect="1"/>
           </p:cNvPicPr>
@@ -3563,7 +3649,7 @@
       <p:grpSpPr/>
       <p:pic>
         <p:nvPicPr>
-          <p:cNvPr id="2" name="Picture 1" descr="slide_08_spatial-hero-SH-A-002.png"/>
+          <p:cNvPr id="2" name="Picture 1" descr="slide_08_spatial-hero-SH-E-004.png"/>
           <p:cNvPicPr>
             <a:picLocks noChangeAspect="1"/>
           </p:cNvPicPr>

--- a/docs/slides/pptx/worldmm_spatial_deck.pptx
+++ b/docs/slides/pptx/worldmm_spatial_deck.pptx
@@ -19,6 +19,8 @@
     <p:sldId id="267" r:id="rId18"/>
     <p:sldId id="268" r:id="rId19"/>
     <p:sldId id="269" r:id="rId20"/>
+    <p:sldId id="270" r:id="rId21"/>
+    <p:sldId id="271" r:id="rId22"/>
   </p:sldIdLst>
   <p:sldSz cx="12191695" cy="6858000" type="screen4x3"/>
   <p:notesSz cx="6858000" cy="9144000"/>
@@ -3145,7 +3147,7 @@
       <p:grpSpPr/>
       <p:pic>
         <p:nvPicPr>
-          <p:cNvPr id="2" name="Picture 1" descr="slide_09_spatial-hero-SH-F-005.png"/>
+          <p:cNvPr id="2" name="Picture 1" descr="slide_09_spatial-hero-SH-C-006.png"/>
           <p:cNvPicPr>
             <a:picLocks noChangeAspect="1"/>
           </p:cNvPicPr>
@@ -3187,7 +3189,7 @@
       <p:grpSpPr/>
       <p:pic>
         <p:nvPicPr>
-          <p:cNvPr id="2" name="Picture 1" descr="slide_10_spatial-hero-SH-A-002.png"/>
+          <p:cNvPr id="2" name="Picture 1" descr="slide_10_spatial-hero-SH-E-004.png"/>
           <p:cNvPicPr>
             <a:picLocks noChangeAspect="1"/>
           </p:cNvPicPr>
@@ -3229,7 +3231,7 @@
       <p:grpSpPr/>
       <p:pic>
         <p:nvPicPr>
-          <p:cNvPr id="2" name="Picture 1" descr="slide_11_spatial-hero-SH-B-001.png"/>
+          <p:cNvPr id="2" name="Picture 1" descr="slide_11_spatial-hero-SH-F-005.png"/>
           <p:cNvPicPr>
             <a:picLocks noChangeAspect="1"/>
           </p:cNvPicPr>
@@ -3271,7 +3273,7 @@
       <p:grpSpPr/>
       <p:pic>
         <p:nvPicPr>
-          <p:cNvPr id="2" name="Picture 1" descr="slide_12_spatial-hero-SH-B-005.png"/>
+          <p:cNvPr id="2" name="Picture 1" descr="slide_12_spatial-hero-SH-A-002.png"/>
           <p:cNvPicPr>
             <a:picLocks noChangeAspect="1"/>
           </p:cNvPicPr>
@@ -3313,7 +3315,91 @@
       <p:grpSpPr/>
       <p:pic>
         <p:nvPicPr>
-          <p:cNvPr id="2" name="Picture 1" descr="slide_13_spatial-hero-SH-B-008.png"/>
+          <p:cNvPr id="2" name="Picture 1" descr="slide_13_spatial-hero-SH-B-001.png"/>
+          <p:cNvPicPr>
+            <a:picLocks noChangeAspect="1"/>
+          </p:cNvPicPr>
+          <p:nvPr/>
+        </p:nvPicPr>
+        <p:blipFill>
+          <a:blip r:embed="rId2"/>
+          <a:stretch>
+            <a:fillRect/>
+          </a:stretch>
+        </p:blipFill>
+        <p:spPr>
+          <a:xfrm>
+            <a:off x="0" y="0"/>
+            <a:ext cx="12191695" cy="6858000"/>
+          </a:xfrm>
+          <a:prstGeom prst="rect">
+            <a:avLst/>
+          </a:prstGeom>
+        </p:spPr>
+      </p:pic>
+    </p:spTree>
+  </p:cSld>
+  <p:clrMapOvr>
+    <a:masterClrMapping/>
+  </p:clrMapOvr>
+</p:sld>
+</file>
+
+<file path=ppt/slides/slide15.xml><?xml version="1.0" encoding="utf-8"?>
+<p:sld xmlns:a="http://schemas.openxmlformats.org/drawingml/2006/main" xmlns:p="http://schemas.openxmlformats.org/presentationml/2006/main" xmlns:r="http://schemas.openxmlformats.org/officeDocument/2006/relationships">
+  <p:cSld>
+    <p:spTree>
+      <p:nvGrpSpPr>
+        <p:cNvPr id="1" name=""/>
+        <p:cNvGrpSpPr/>
+        <p:nvPr/>
+      </p:nvGrpSpPr>
+      <p:grpSpPr/>
+      <p:pic>
+        <p:nvPicPr>
+          <p:cNvPr id="2" name="Picture 1" descr="slide_14_spatial-hero-SH-B-005.png"/>
+          <p:cNvPicPr>
+            <a:picLocks noChangeAspect="1"/>
+          </p:cNvPicPr>
+          <p:nvPr/>
+        </p:nvPicPr>
+        <p:blipFill>
+          <a:blip r:embed="rId2"/>
+          <a:stretch>
+            <a:fillRect/>
+          </a:stretch>
+        </p:blipFill>
+        <p:spPr>
+          <a:xfrm>
+            <a:off x="0" y="0"/>
+            <a:ext cx="12191695" cy="6858000"/>
+          </a:xfrm>
+          <a:prstGeom prst="rect">
+            <a:avLst/>
+          </a:prstGeom>
+        </p:spPr>
+      </p:pic>
+    </p:spTree>
+  </p:cSld>
+  <p:clrMapOvr>
+    <a:masterClrMapping/>
+  </p:clrMapOvr>
+</p:sld>
+</file>
+
+<file path=ppt/slides/slide16.xml><?xml version="1.0" encoding="utf-8"?>
+<p:sld xmlns:a="http://schemas.openxmlformats.org/drawingml/2006/main" xmlns:p="http://schemas.openxmlformats.org/presentationml/2006/main" xmlns:r="http://schemas.openxmlformats.org/officeDocument/2006/relationships">
+  <p:cSld>
+    <p:spTree>
+      <p:nvGrpSpPr>
+        <p:cNvPr id="1" name=""/>
+        <p:cNvGrpSpPr/>
+        <p:nvPr/>
+      </p:nvGrpSpPr>
+      <p:grpSpPr/>
+      <p:pic>
+        <p:nvPicPr>
+          <p:cNvPr id="2" name="Picture 1" descr="slide_15_spatial-hero-SH-B-008.png"/>
           <p:cNvPicPr>
             <a:picLocks noChangeAspect="1"/>
           </p:cNvPicPr>
@@ -3523,7 +3609,7 @@
       <p:grpSpPr/>
       <p:pic>
         <p:nvPicPr>
-          <p:cNvPr id="2" name="Picture 1" descr="slide_05_spatial-hero-SH-A-001.png"/>
+          <p:cNvPr id="2" name="Picture 1" descr="slide_05_place-graph-comparison.png"/>
           <p:cNvPicPr>
             <a:picLocks noChangeAspect="1"/>
           </p:cNvPicPr>
@@ -3565,7 +3651,7 @@
       <p:grpSpPr/>
       <p:pic>
         <p:nvPicPr>
-          <p:cNvPr id="2" name="Picture 1" descr="slide_06_spatial-hero-SH-B-002.png"/>
+          <p:cNvPr id="2" name="Picture 1" descr="slide_06_aea-gaze-fixation.png"/>
           <p:cNvPicPr>
             <a:picLocks noChangeAspect="1"/>
           </p:cNvPicPr>
@@ -3607,7 +3693,7 @@
       <p:grpSpPr/>
       <p:pic>
         <p:nvPicPr>
-          <p:cNvPr id="2" name="Picture 1" descr="slide_07_spatial-hero-SH-C-006.png"/>
+          <p:cNvPr id="2" name="Picture 1" descr="slide_07_spatial-hero-SH-A-001.png"/>
           <p:cNvPicPr>
             <a:picLocks noChangeAspect="1"/>
           </p:cNvPicPr>
@@ -3649,7 +3735,7 @@
       <p:grpSpPr/>
       <p:pic>
         <p:nvPicPr>
-          <p:cNvPr id="2" name="Picture 1" descr="slide_08_spatial-hero-SH-E-004.png"/>
+          <p:cNvPr id="2" name="Picture 1" descr="slide_08_spatial-hero-SH-B-002.png"/>
           <p:cNvPicPr>
             <a:picLocks noChangeAspect="1"/>
           </p:cNvPicPr>
